--- a/Section 504/t2-lesson2-vertical-horizontal-transformations-504.pptx
+++ b/Section 504/t2-lesson2-vertical-horizontal-transformations-504.pptx
@@ -2543,6 +2543,40 @@
           </a:p>
         </p:txBody>
       </p:sp>
+      <p:sp>
+        <p:nvSpPr>
+          <p:cNvPr id="9" name="Slide Number 9"/>
+          <p:cNvSpPr txBox="1"/>
+          <p:nvPr/>
+        </p:nvSpPr>
+        <p:spPr>
+          <a:xfrm>
+            <a:off x="11277295" y="6611112"/>
+            <a:ext cx="685800" cy="201168"/>
+          </a:xfrm>
+          <a:prstGeom prst="rect">
+            <a:avLst/>
+          </a:prstGeom>
+          <a:noFill/>
+        </p:spPr>
+        <p:txBody>
+          <a:bodyPr wrap="none" lIns="0" tIns="0" rIns="0" bIns="0" anchor="b">
+            <a:noAutofit/>
+          </a:bodyPr>
+          <a:lstStyle/>
+          <a:p>
+            <a:pPr algn="r"/>
+            <a:fld id="{5C1A6E0B-3B1F-4D5E-9C7A-2F4B8D6E1A90}" type="slidenum">
+              <a:rPr lang="en-US" sz="1200" dirty="0">
+                <a:solidFill>
+                  <a:srgbClr val="5F6272"/>
+                </a:solidFill>
+              </a:rPr>
+              <a:t>1</a:t>
+            </a:fld>
+          </a:p>
+        </p:txBody>
+      </p:sp>
     </p:spTree>
   </p:cSld>
   <p:clrMapOvr>
@@ -5101,6 +5135,40 @@
               <a:t xml:space="preserve">r(x)</a:t>
             </a:r>
             <a:endParaRPr lang="en-US" sz="1275" dirty="0"/>
+          </a:p>
+        </p:txBody>
+      </p:sp>
+      <p:sp>
+        <p:nvSpPr>
+          <p:cNvPr id="66" name="Slide Number 66"/>
+          <p:cNvSpPr txBox="1"/>
+          <p:nvPr/>
+        </p:nvSpPr>
+        <p:spPr>
+          <a:xfrm>
+            <a:off x="11277295" y="6611112"/>
+            <a:ext cx="685800" cy="201168"/>
+          </a:xfrm>
+          <a:prstGeom prst="rect">
+            <a:avLst/>
+          </a:prstGeom>
+          <a:noFill/>
+        </p:spPr>
+        <p:txBody>
+          <a:bodyPr wrap="none" lIns="0" tIns="0" rIns="0" bIns="0" anchor="b">
+            <a:noAutofit/>
+          </a:bodyPr>
+          <a:lstStyle/>
+          <a:p>
+            <a:pPr algn="r"/>
+            <a:fld id="{5C1A6E0B-3B1F-4D5E-9C7A-2F4B8D6E1A90}" type="slidenum">
+              <a:rPr lang="en-US" sz="1200" dirty="0">
+                <a:solidFill>
+                  <a:srgbClr val="5F6272"/>
+                </a:solidFill>
+              </a:rPr>
+              <a:t>10</a:t>
+            </a:fld>
           </a:p>
         </p:txBody>
       </p:sp>
@@ -6270,6 +6338,40 @@
               <a:t xml:space="preserve">.</a:t>
             </a:r>
             <a:endParaRPr lang="en-US" sz="1950" dirty="0"/>
+          </a:p>
+        </p:txBody>
+      </p:sp>
+      <p:sp>
+        <p:nvSpPr>
+          <p:cNvPr id="7" name="Slide Number 7"/>
+          <p:cNvSpPr txBox="1"/>
+          <p:nvPr/>
+        </p:nvSpPr>
+        <p:spPr>
+          <a:xfrm>
+            <a:off x="11277295" y="6611112"/>
+            <a:ext cx="685800" cy="201168"/>
+          </a:xfrm>
+          <a:prstGeom prst="rect">
+            <a:avLst/>
+          </a:prstGeom>
+          <a:noFill/>
+        </p:spPr>
+        <p:txBody>
+          <a:bodyPr wrap="none" lIns="0" tIns="0" rIns="0" bIns="0" anchor="b">
+            <a:noAutofit/>
+          </a:bodyPr>
+          <a:lstStyle/>
+          <a:p>
+            <a:pPr algn="r"/>
+            <a:fld id="{5C1A6E0B-3B1F-4D5E-9C7A-2F4B8D6E1A90}" type="slidenum">
+              <a:rPr lang="en-US" sz="1200" dirty="0">
+                <a:solidFill>
+                  <a:srgbClr val="5F6272"/>
+                </a:solidFill>
+              </a:rPr>
+              <a:t>11</a:t>
+            </a:fld>
           </a:p>
         </p:txBody>
       </p:sp>
@@ -7492,6 +7594,40 @@
           </a:p>
         </p:txBody>
       </p:sp>
+      <p:sp>
+        <p:nvSpPr>
+          <p:cNvPr id="16" name="Slide Number 16"/>
+          <p:cNvSpPr txBox="1"/>
+          <p:nvPr/>
+        </p:nvSpPr>
+        <p:spPr>
+          <a:xfrm>
+            <a:off x="11277295" y="6611112"/>
+            <a:ext cx="685800" cy="201168"/>
+          </a:xfrm>
+          <a:prstGeom prst="rect">
+            <a:avLst/>
+          </a:prstGeom>
+          <a:noFill/>
+        </p:spPr>
+        <p:txBody>
+          <a:bodyPr wrap="none" lIns="0" tIns="0" rIns="0" bIns="0" anchor="b">
+            <a:noAutofit/>
+          </a:bodyPr>
+          <a:lstStyle/>
+          <a:p>
+            <a:pPr algn="r"/>
+            <a:fld id="{5C1A6E0B-3B1F-4D5E-9C7A-2F4B8D6E1A90}" type="slidenum">
+              <a:rPr lang="en-US" sz="1200" dirty="0">
+                <a:solidFill>
+                  <a:srgbClr val="5F6272"/>
+                </a:solidFill>
+              </a:rPr>
+              <a:t>12</a:t>
+            </a:fld>
+          </a:p>
+        </p:txBody>
+      </p:sp>
     </p:spTree>
   </p:cSld>
   <p:clrMapOvr>
@@ -7649,6 +7785,40 @@
               <a:t xml:space="preserve">Essential Question: What effect do horizontal transformations have on linear functions? How do they compare to vertical transformations?</a:t>
             </a:r>
             <a:endParaRPr lang="en-US" sz="2400" dirty="0"/>
+          </a:p>
+        </p:txBody>
+      </p:sp>
+      <p:sp>
+        <p:nvSpPr>
+          <p:cNvPr id="5" name="Slide Number 5"/>
+          <p:cNvSpPr txBox="1"/>
+          <p:nvPr/>
+        </p:nvSpPr>
+        <p:spPr>
+          <a:xfrm>
+            <a:off x="11277295" y="6611112"/>
+            <a:ext cx="685800" cy="201168"/>
+          </a:xfrm>
+          <a:prstGeom prst="rect">
+            <a:avLst/>
+          </a:prstGeom>
+          <a:noFill/>
+        </p:spPr>
+        <p:txBody>
+          <a:bodyPr wrap="none" lIns="0" tIns="0" rIns="0" bIns="0" anchor="b">
+            <a:noAutofit/>
+          </a:bodyPr>
+          <a:lstStyle/>
+          <a:p>
+            <a:pPr algn="r"/>
+            <a:fld id="{5C1A6E0B-3B1F-4D5E-9C7A-2F4B8D6E1A90}" type="slidenum">
+              <a:rPr lang="en-US" sz="1200" dirty="0">
+                <a:solidFill>
+                  <a:srgbClr val="5F6272"/>
+                </a:solidFill>
+              </a:rPr>
+              <a:t>13</a:t>
+            </a:fld>
           </a:p>
         </p:txBody>
       </p:sp>
@@ -9015,6 +9185,40 @@
           </a:p>
         </p:txBody>
       </p:sp>
+      <p:sp>
+        <p:nvSpPr>
+          <p:cNvPr id="12" name="Slide Number 12"/>
+          <p:cNvSpPr txBox="1"/>
+          <p:nvPr/>
+        </p:nvSpPr>
+        <p:spPr>
+          <a:xfrm>
+            <a:off x="11277295" y="6611112"/>
+            <a:ext cx="685800" cy="201168"/>
+          </a:xfrm>
+          <a:prstGeom prst="rect">
+            <a:avLst/>
+          </a:prstGeom>
+          <a:noFill/>
+        </p:spPr>
+        <p:txBody>
+          <a:bodyPr wrap="none" lIns="0" tIns="0" rIns="0" bIns="0" anchor="b">
+            <a:noAutofit/>
+          </a:bodyPr>
+          <a:lstStyle/>
+          <a:p>
+            <a:pPr algn="r"/>
+            <a:fld id="{5C1A6E0B-3B1F-4D5E-9C7A-2F4B8D6E1A90}" type="slidenum">
+              <a:rPr lang="en-US" sz="1200" dirty="0">
+                <a:solidFill>
+                  <a:srgbClr val="5F6272"/>
+                </a:solidFill>
+              </a:rPr>
+              <a:t>14</a:t>
+            </a:fld>
+          </a:p>
+        </p:txBody>
+      </p:sp>
     </p:spTree>
   </p:cSld>
   <p:clrMapOvr>
@@ -9825,6 +10029,40 @@
           </a:p>
         </p:txBody>
       </p:sp>
+      <p:sp>
+        <p:nvSpPr>
+          <p:cNvPr id="10" name="Slide Number 10"/>
+          <p:cNvSpPr txBox="1"/>
+          <p:nvPr/>
+        </p:nvSpPr>
+        <p:spPr>
+          <a:xfrm>
+            <a:off x="11277295" y="6611112"/>
+            <a:ext cx="685800" cy="201168"/>
+          </a:xfrm>
+          <a:prstGeom prst="rect">
+            <a:avLst/>
+          </a:prstGeom>
+          <a:noFill/>
+        </p:spPr>
+        <p:txBody>
+          <a:bodyPr wrap="none" lIns="0" tIns="0" rIns="0" bIns="0" anchor="b">
+            <a:noAutofit/>
+          </a:bodyPr>
+          <a:lstStyle/>
+          <a:p>
+            <a:pPr algn="r"/>
+            <a:fld id="{5C1A6E0B-3B1F-4D5E-9C7A-2F4B8D6E1A90}" type="slidenum">
+              <a:rPr lang="en-US" sz="1200" dirty="0">
+                <a:solidFill>
+                  <a:srgbClr val="5F6272"/>
+                </a:solidFill>
+              </a:rPr>
+              <a:t>15</a:t>
+            </a:fld>
+          </a:p>
+        </p:txBody>
+      </p:sp>
     </p:spTree>
   </p:cSld>
   <p:clrMapOvr>
@@ -13664,6 +13902,40 @@
               <a:t xml:space="preserve">, with different tables.</a:t>
             </a:r>
             <a:endParaRPr lang="en-US" sz="1575" dirty="0"/>
+          </a:p>
+        </p:txBody>
+      </p:sp>
+      <p:sp>
+        <p:nvSpPr>
+          <p:cNvPr id="98" name="Slide Number 98"/>
+          <p:cNvSpPr txBox="1"/>
+          <p:nvPr/>
+        </p:nvSpPr>
+        <p:spPr>
+          <a:xfrm>
+            <a:off x="11277295" y="6611112"/>
+            <a:ext cx="685800" cy="201168"/>
+          </a:xfrm>
+          <a:prstGeom prst="rect">
+            <a:avLst/>
+          </a:prstGeom>
+          <a:noFill/>
+        </p:spPr>
+        <p:txBody>
+          <a:bodyPr wrap="none" lIns="0" tIns="0" rIns="0" bIns="0" anchor="b">
+            <a:noAutofit/>
+          </a:bodyPr>
+          <a:lstStyle/>
+          <a:p>
+            <a:pPr algn="r"/>
+            <a:fld id="{5C1A6E0B-3B1F-4D5E-9C7A-2F4B8D6E1A90}" type="slidenum">
+              <a:rPr lang="en-US" sz="1200" dirty="0">
+                <a:solidFill>
+                  <a:srgbClr val="5F6272"/>
+                </a:solidFill>
+              </a:rPr>
+              <a:t>16</a:t>
+            </a:fld>
           </a:p>
         </p:txBody>
       </p:sp>
@@ -18785,6 +19057,40 @@
           </a:p>
         </p:txBody>
       </p:sp>
+      <p:sp>
+        <p:nvSpPr>
+          <p:cNvPr id="55" name="Slide Number 55"/>
+          <p:cNvSpPr txBox="1"/>
+          <p:nvPr/>
+        </p:nvSpPr>
+        <p:spPr>
+          <a:xfrm>
+            <a:off x="11277295" y="6611112"/>
+            <a:ext cx="685800" cy="201168"/>
+          </a:xfrm>
+          <a:prstGeom prst="rect">
+            <a:avLst/>
+          </a:prstGeom>
+          <a:noFill/>
+        </p:spPr>
+        <p:txBody>
+          <a:bodyPr wrap="none" lIns="0" tIns="0" rIns="0" bIns="0" anchor="b">
+            <a:noAutofit/>
+          </a:bodyPr>
+          <a:lstStyle/>
+          <a:p>
+            <a:pPr algn="r"/>
+            <a:fld id="{5C1A6E0B-3B1F-4D5E-9C7A-2F4B8D6E1A90}" type="slidenum">
+              <a:rPr lang="en-US" sz="1200" dirty="0">
+                <a:solidFill>
+                  <a:srgbClr val="5F6272"/>
+                </a:solidFill>
+              </a:rPr>
+              <a:t>17</a:t>
+            </a:fld>
+          </a:p>
+        </p:txBody>
+      </p:sp>
     </p:spTree>
   </p:cSld>
   <p:clrMapOvr>
@@ -22848,6 +23154,40 @@
           </a:ln>
         </p:spPr>
       </p:cxnSp>
+      <p:sp>
+        <p:nvSpPr>
+          <p:cNvPr id="53" name="Slide Number 53"/>
+          <p:cNvSpPr txBox="1"/>
+          <p:nvPr/>
+        </p:nvSpPr>
+        <p:spPr>
+          <a:xfrm>
+            <a:off x="11277295" y="6611112"/>
+            <a:ext cx="685800" cy="201168"/>
+          </a:xfrm>
+          <a:prstGeom prst="rect">
+            <a:avLst/>
+          </a:prstGeom>
+          <a:noFill/>
+        </p:spPr>
+        <p:txBody>
+          <a:bodyPr wrap="none" lIns="0" tIns="0" rIns="0" bIns="0" anchor="b">
+            <a:noAutofit/>
+          </a:bodyPr>
+          <a:lstStyle/>
+          <a:p>
+            <a:pPr algn="r"/>
+            <a:fld id="{5C1A6E0B-3B1F-4D5E-9C7A-2F4B8D6E1A90}" type="slidenum">
+              <a:rPr lang="en-US" sz="1200" dirty="0">
+                <a:solidFill>
+                  <a:srgbClr val="5F6272"/>
+                </a:solidFill>
+              </a:rPr>
+              <a:t>18</a:t>
+            </a:fld>
+          </a:p>
+        </p:txBody>
+      </p:sp>
     </p:spTree>
   </p:cSld>
   <p:clrMapOvr>
@@ -25320,6 +25660,40 @@
               <a:t xml:space="preserve"> + 5</a:t>
             </a:r>
             <a:endParaRPr lang="en-US" sz="2325" dirty="0"/>
+          </a:p>
+        </p:txBody>
+      </p:sp>
+      <p:sp>
+        <p:nvSpPr>
+          <p:cNvPr id="28" name="Slide Number 28"/>
+          <p:cNvSpPr txBox="1"/>
+          <p:nvPr/>
+        </p:nvSpPr>
+        <p:spPr>
+          <a:xfrm>
+            <a:off x="11277295" y="6611112"/>
+            <a:ext cx="685800" cy="201168"/>
+          </a:xfrm>
+          <a:prstGeom prst="rect">
+            <a:avLst/>
+          </a:prstGeom>
+          <a:noFill/>
+        </p:spPr>
+        <p:txBody>
+          <a:bodyPr wrap="none" lIns="0" tIns="0" rIns="0" bIns="0" anchor="b">
+            <a:noAutofit/>
+          </a:bodyPr>
+          <a:lstStyle/>
+          <a:p>
+            <a:pPr algn="r"/>
+            <a:fld id="{5C1A6E0B-3B1F-4D5E-9C7A-2F4B8D6E1A90}" type="slidenum">
+              <a:rPr lang="en-US" sz="1200" dirty="0">
+                <a:solidFill>
+                  <a:srgbClr val="5F6272"/>
+                </a:solidFill>
+              </a:rPr>
+              <a:t>19</a:t>
+            </a:fld>
           </a:p>
         </p:txBody>
       </p:sp>
@@ -27475,6 +27849,40 @@
           </a:p>
         </p:txBody>
       </p:sp>
+      <p:sp>
+        <p:nvSpPr>
+          <p:cNvPr id="12" name="Slide Number 12"/>
+          <p:cNvSpPr txBox="1"/>
+          <p:nvPr/>
+        </p:nvSpPr>
+        <p:spPr>
+          <a:xfrm>
+            <a:off x="11277295" y="6611112"/>
+            <a:ext cx="685800" cy="201168"/>
+          </a:xfrm>
+          <a:prstGeom prst="rect">
+            <a:avLst/>
+          </a:prstGeom>
+          <a:noFill/>
+        </p:spPr>
+        <p:txBody>
+          <a:bodyPr wrap="none" lIns="0" tIns="0" rIns="0" bIns="0" anchor="b">
+            <a:noAutofit/>
+          </a:bodyPr>
+          <a:lstStyle/>
+          <a:p>
+            <a:pPr algn="r"/>
+            <a:fld id="{5C1A6E0B-3B1F-4D5E-9C7A-2F4B8D6E1A90}" type="slidenum">
+              <a:rPr lang="en-US" sz="1200" dirty="0">
+                <a:solidFill>
+                  <a:srgbClr val="5F6272"/>
+                </a:solidFill>
+              </a:rPr>
+              <a:t>2</a:t>
+            </a:fld>
+          </a:p>
+        </p:txBody>
+      </p:sp>
     </p:spTree>
   </p:cSld>
   <p:clrMapOvr>
@@ -28875,6 +29283,40 @@
           </a:p>
         </p:txBody>
       </p:sp>
+      <p:sp>
+        <p:nvSpPr>
+          <p:cNvPr id="16" name="Slide Number 16"/>
+          <p:cNvSpPr txBox="1"/>
+          <p:nvPr/>
+        </p:nvSpPr>
+        <p:spPr>
+          <a:xfrm>
+            <a:off x="11277295" y="6611112"/>
+            <a:ext cx="685800" cy="201168"/>
+          </a:xfrm>
+          <a:prstGeom prst="rect">
+            <a:avLst/>
+          </a:prstGeom>
+          <a:noFill/>
+        </p:spPr>
+        <p:txBody>
+          <a:bodyPr wrap="none" lIns="0" tIns="0" rIns="0" bIns="0" anchor="b">
+            <a:noAutofit/>
+          </a:bodyPr>
+          <a:lstStyle/>
+          <a:p>
+            <a:pPr algn="r"/>
+            <a:fld id="{5C1A6E0B-3B1F-4D5E-9C7A-2F4B8D6E1A90}" type="slidenum">
+              <a:rPr lang="en-US" sz="1200" dirty="0">
+                <a:solidFill>
+                  <a:srgbClr val="5F6272"/>
+                </a:solidFill>
+              </a:rPr>
+              <a:t>20</a:t>
+            </a:fld>
+          </a:p>
+        </p:txBody>
+      </p:sp>
     </p:spTree>
   </p:cSld>
   <p:clrMapOvr>
@@ -30163,6 +30605,40 @@
           </a:p>
         </p:txBody>
       </p:sp>
+      <p:sp>
+        <p:nvSpPr>
+          <p:cNvPr id="16" name="Slide Number 16"/>
+          <p:cNvSpPr txBox="1"/>
+          <p:nvPr/>
+        </p:nvSpPr>
+        <p:spPr>
+          <a:xfrm>
+            <a:off x="11277295" y="6611112"/>
+            <a:ext cx="685800" cy="201168"/>
+          </a:xfrm>
+          <a:prstGeom prst="rect">
+            <a:avLst/>
+          </a:prstGeom>
+          <a:noFill/>
+        </p:spPr>
+        <p:txBody>
+          <a:bodyPr wrap="none" lIns="0" tIns="0" rIns="0" bIns="0" anchor="b">
+            <a:noAutofit/>
+          </a:bodyPr>
+          <a:lstStyle/>
+          <a:p>
+            <a:pPr algn="r"/>
+            <a:fld id="{5C1A6E0B-3B1F-4D5E-9C7A-2F4B8D6E1A90}" type="slidenum">
+              <a:rPr lang="en-US" sz="1200" dirty="0">
+                <a:solidFill>
+                  <a:srgbClr val="5F6272"/>
+                </a:solidFill>
+              </a:rPr>
+              <a:t>21</a:t>
+            </a:fld>
+          </a:p>
+        </p:txBody>
+      </p:sp>
     </p:spTree>
   </p:cSld>
   <p:clrMapOvr>
@@ -30818,6 +31294,40 @@
               <a:t xml:space="preserve"> the same.</a:t>
             </a:r>
             <a:endParaRPr lang="en-US" sz="1950" dirty="0"/>
+          </a:p>
+        </p:txBody>
+      </p:sp>
+      <p:sp>
+        <p:nvSpPr>
+          <p:cNvPr id="7" name="Slide Number 7"/>
+          <p:cNvSpPr txBox="1"/>
+          <p:nvPr/>
+        </p:nvSpPr>
+        <p:spPr>
+          <a:xfrm>
+            <a:off x="11277295" y="6611112"/>
+            <a:ext cx="685800" cy="201168"/>
+          </a:xfrm>
+          <a:prstGeom prst="rect">
+            <a:avLst/>
+          </a:prstGeom>
+          <a:noFill/>
+        </p:spPr>
+        <p:txBody>
+          <a:bodyPr wrap="none" lIns="0" tIns="0" rIns="0" bIns="0" anchor="b">
+            <a:noAutofit/>
+          </a:bodyPr>
+          <a:lstStyle/>
+          <a:p>
+            <a:pPr algn="r"/>
+            <a:fld id="{5C1A6E0B-3B1F-4D5E-9C7A-2F4B8D6E1A90}" type="slidenum">
+              <a:rPr lang="en-US" sz="1200" dirty="0">
+                <a:solidFill>
+                  <a:srgbClr val="5F6272"/>
+                </a:solidFill>
+              </a:rPr>
+              <a:t>22</a:t>
+            </a:fld>
           </a:p>
         </p:txBody>
       </p:sp>
@@ -32010,6 +32520,40 @@
           </a:p>
         </p:txBody>
       </p:sp>
+      <p:sp>
+        <p:nvSpPr>
+          <p:cNvPr id="10" name="Slide Number 10"/>
+          <p:cNvSpPr txBox="1"/>
+          <p:nvPr/>
+        </p:nvSpPr>
+        <p:spPr>
+          <a:xfrm>
+            <a:off x="11277295" y="6611112"/>
+            <a:ext cx="685800" cy="201168"/>
+          </a:xfrm>
+          <a:prstGeom prst="rect">
+            <a:avLst/>
+          </a:prstGeom>
+          <a:noFill/>
+        </p:spPr>
+        <p:txBody>
+          <a:bodyPr wrap="none" lIns="0" tIns="0" rIns="0" bIns="0" anchor="b">
+            <a:noAutofit/>
+          </a:bodyPr>
+          <a:lstStyle/>
+          <a:p>
+            <a:pPr algn="r"/>
+            <a:fld id="{5C1A6E0B-3B1F-4D5E-9C7A-2F4B8D6E1A90}" type="slidenum">
+              <a:rPr lang="en-US" sz="1200" dirty="0">
+                <a:solidFill>
+                  <a:srgbClr val="5F6272"/>
+                </a:solidFill>
+              </a:rPr>
+              <a:t>23</a:t>
+            </a:fld>
+          </a:p>
+        </p:txBody>
+      </p:sp>
     </p:spTree>
   </p:cSld>
   <p:clrMapOvr>
@@ -33135,6 +33679,40 @@
           </a:p>
         </p:txBody>
       </p:sp>
+      <p:sp>
+        <p:nvSpPr>
+          <p:cNvPr id="16" name="Slide Number 16"/>
+          <p:cNvSpPr txBox="1"/>
+          <p:nvPr/>
+        </p:nvSpPr>
+        <p:spPr>
+          <a:xfrm>
+            <a:off x="11277295" y="6611112"/>
+            <a:ext cx="685800" cy="201168"/>
+          </a:xfrm>
+          <a:prstGeom prst="rect">
+            <a:avLst/>
+          </a:prstGeom>
+          <a:noFill/>
+        </p:spPr>
+        <p:txBody>
+          <a:bodyPr wrap="none" lIns="0" tIns="0" rIns="0" bIns="0" anchor="b">
+            <a:noAutofit/>
+          </a:bodyPr>
+          <a:lstStyle/>
+          <a:p>
+            <a:pPr algn="r"/>
+            <a:fld id="{5C1A6E0B-3B1F-4D5E-9C7A-2F4B8D6E1A90}" type="slidenum">
+              <a:rPr lang="en-US" sz="1200" dirty="0">
+                <a:solidFill>
+                  <a:srgbClr val="5F6272"/>
+                </a:solidFill>
+              </a:rPr>
+              <a:t>24</a:t>
+            </a:fld>
+          </a:p>
+        </p:txBody>
+      </p:sp>
     </p:spTree>
   </p:cSld>
   <p:clrMapOvr>
@@ -34371,6 +34949,40 @@
           </a:p>
         </p:txBody>
       </p:sp>
+      <p:sp>
+        <p:nvSpPr>
+          <p:cNvPr id="15" name="Slide Number 15"/>
+          <p:cNvSpPr txBox="1"/>
+          <p:nvPr/>
+        </p:nvSpPr>
+        <p:spPr>
+          <a:xfrm>
+            <a:off x="11277295" y="6611112"/>
+            <a:ext cx="685800" cy="201168"/>
+          </a:xfrm>
+          <a:prstGeom prst="rect">
+            <a:avLst/>
+          </a:prstGeom>
+          <a:noFill/>
+        </p:spPr>
+        <p:txBody>
+          <a:bodyPr wrap="none" lIns="0" tIns="0" rIns="0" bIns="0" anchor="b">
+            <a:noAutofit/>
+          </a:bodyPr>
+          <a:lstStyle/>
+          <a:p>
+            <a:pPr algn="r"/>
+            <a:fld id="{5C1A6E0B-3B1F-4D5E-9C7A-2F4B8D6E1A90}" type="slidenum">
+              <a:rPr lang="en-US" sz="1200" dirty="0">
+                <a:solidFill>
+                  <a:srgbClr val="5F6272"/>
+                </a:solidFill>
+              </a:rPr>
+              <a:t>25</a:t>
+            </a:fld>
+          </a:p>
+        </p:txBody>
+      </p:sp>
     </p:spTree>
   </p:cSld>
   <p:clrMapOvr>
@@ -34667,6 +35279,40 @@
           </a:p>
         </p:txBody>
       </p:sp>
+      <p:sp>
+        <p:nvSpPr>
+          <p:cNvPr id="8" name="Slide Number 8"/>
+          <p:cNvSpPr txBox="1"/>
+          <p:nvPr/>
+        </p:nvSpPr>
+        <p:spPr>
+          <a:xfrm>
+            <a:off x="11277295" y="6611112"/>
+            <a:ext cx="685800" cy="201168"/>
+          </a:xfrm>
+          <a:prstGeom prst="rect">
+            <a:avLst/>
+          </a:prstGeom>
+          <a:noFill/>
+        </p:spPr>
+        <p:txBody>
+          <a:bodyPr wrap="none" lIns="0" tIns="0" rIns="0" bIns="0" anchor="b">
+            <a:noAutofit/>
+          </a:bodyPr>
+          <a:lstStyle/>
+          <a:p>
+            <a:pPr algn="r"/>
+            <a:fld id="{5C1A6E0B-3B1F-4D5E-9C7A-2F4B8D6E1A90}" type="slidenum">
+              <a:rPr lang="en-US" sz="1200" dirty="0">
+                <a:solidFill>
+                  <a:srgbClr val="5F6272"/>
+                </a:solidFill>
+              </a:rPr>
+              <a:t>3</a:t>
+            </a:fld>
+          </a:p>
+        </p:txBody>
+      </p:sp>
     </p:spTree>
   </p:cSld>
   <p:clrMapOvr>
@@ -35138,6 +35784,40 @@
               <a:t xml:space="preserve">).</a:t>
             </a:r>
             <a:endParaRPr lang="en-US" sz="1950" dirty="0"/>
+          </a:p>
+        </p:txBody>
+      </p:sp>
+      <p:sp>
+        <p:nvSpPr>
+          <p:cNvPr id="6" name="Slide Number 6"/>
+          <p:cNvSpPr txBox="1"/>
+          <p:nvPr/>
+        </p:nvSpPr>
+        <p:spPr>
+          <a:xfrm>
+            <a:off x="11277295" y="6611112"/>
+            <a:ext cx="685800" cy="201168"/>
+          </a:xfrm>
+          <a:prstGeom prst="rect">
+            <a:avLst/>
+          </a:prstGeom>
+          <a:noFill/>
+        </p:spPr>
+        <p:txBody>
+          <a:bodyPr wrap="none" lIns="0" tIns="0" rIns="0" bIns="0" anchor="b">
+            <a:noAutofit/>
+          </a:bodyPr>
+          <a:lstStyle/>
+          <a:p>
+            <a:pPr algn="r"/>
+            <a:fld id="{5C1A6E0B-3B1F-4D5E-9C7A-2F4B8D6E1A90}" type="slidenum">
+              <a:rPr lang="en-US" sz="1200" dirty="0">
+                <a:solidFill>
+                  <a:srgbClr val="5F6272"/>
+                </a:solidFill>
+              </a:rPr>
+              <a:t>4</a:t>
+            </a:fld>
           </a:p>
         </p:txBody>
       </p:sp>
@@ -36531,6 +37211,40 @@
           </a:p>
         </p:txBody>
       </p:sp>
+      <p:sp>
+        <p:nvSpPr>
+          <p:cNvPr id="24" name="Slide Number 24"/>
+          <p:cNvSpPr txBox="1"/>
+          <p:nvPr/>
+        </p:nvSpPr>
+        <p:spPr>
+          <a:xfrm>
+            <a:off x="11277295" y="6611112"/>
+            <a:ext cx="685800" cy="201168"/>
+          </a:xfrm>
+          <a:prstGeom prst="rect">
+            <a:avLst/>
+          </a:prstGeom>
+          <a:noFill/>
+        </p:spPr>
+        <p:txBody>
+          <a:bodyPr wrap="none" lIns="0" tIns="0" rIns="0" bIns="0" anchor="b">
+            <a:noAutofit/>
+          </a:bodyPr>
+          <a:lstStyle/>
+          <a:p>
+            <a:pPr algn="r"/>
+            <a:fld id="{5C1A6E0B-3B1F-4D5E-9C7A-2F4B8D6E1A90}" type="slidenum">
+              <a:rPr lang="en-US" sz="1200" dirty="0">
+                <a:solidFill>
+                  <a:srgbClr val="5F6272"/>
+                </a:solidFill>
+              </a:rPr>
+              <a:t>5</a:t>
+            </a:fld>
+          </a:p>
+        </p:txBody>
+      </p:sp>
     </p:spTree>
   </p:cSld>
   <p:clrMapOvr>
@@ -36688,6 +37402,40 @@
               <a:t xml:space="preserve">What effect do horizontal transformations have on linear functions? How do they compare to vertical transformations?</a:t>
             </a:r>
             <a:endParaRPr lang="en-US" sz="2700" dirty="0"/>
+          </a:p>
+        </p:txBody>
+      </p:sp>
+      <p:sp>
+        <p:nvSpPr>
+          <p:cNvPr id="5" name="Slide Number 5"/>
+          <p:cNvSpPr txBox="1"/>
+          <p:nvPr/>
+        </p:nvSpPr>
+        <p:spPr>
+          <a:xfrm>
+            <a:off x="11277295" y="6611112"/>
+            <a:ext cx="685800" cy="201168"/>
+          </a:xfrm>
+          <a:prstGeom prst="rect">
+            <a:avLst/>
+          </a:prstGeom>
+          <a:noFill/>
+        </p:spPr>
+        <p:txBody>
+          <a:bodyPr wrap="none" lIns="0" tIns="0" rIns="0" bIns="0" anchor="b">
+            <a:noAutofit/>
+          </a:bodyPr>
+          <a:lstStyle/>
+          <a:p>
+            <a:pPr algn="r"/>
+            <a:fld id="{5C1A6E0B-3B1F-4D5E-9C7A-2F4B8D6E1A90}" type="slidenum">
+              <a:rPr lang="en-US" sz="1200" dirty="0">
+                <a:solidFill>
+                  <a:srgbClr val="5F6272"/>
+                </a:solidFill>
+              </a:rPr>
+              <a:t>6</a:t>
+            </a:fld>
           </a:p>
         </p:txBody>
       </p:sp>
@@ -40198,6 +40946,40 @@
           </a:p>
         </p:txBody>
       </p:sp>
+      <p:sp>
+        <p:nvSpPr>
+          <p:cNvPr id="103" name="Slide Number 103"/>
+          <p:cNvSpPr txBox="1"/>
+          <p:nvPr/>
+        </p:nvSpPr>
+        <p:spPr>
+          <a:xfrm>
+            <a:off x="11277295" y="6611112"/>
+            <a:ext cx="685800" cy="201168"/>
+          </a:xfrm>
+          <a:prstGeom prst="rect">
+            <a:avLst/>
+          </a:prstGeom>
+          <a:noFill/>
+        </p:spPr>
+        <p:txBody>
+          <a:bodyPr wrap="none" lIns="0" tIns="0" rIns="0" bIns="0" anchor="b">
+            <a:noAutofit/>
+          </a:bodyPr>
+          <a:lstStyle/>
+          <a:p>
+            <a:pPr algn="r"/>
+            <a:fld id="{5C1A6E0B-3B1F-4D5E-9C7A-2F4B8D6E1A90}" type="slidenum">
+              <a:rPr lang="en-US" sz="1200" dirty="0">
+                <a:solidFill>
+                  <a:srgbClr val="5F6272"/>
+                </a:solidFill>
+              </a:rPr>
+              <a:t>7</a:t>
+            </a:fld>
+          </a:p>
+        </p:txBody>
+      </p:sp>
     </p:spTree>
   </p:cSld>
   <p:clrMapOvr>
@@ -45045,6 +45827,40 @@
               <a:t xml:space="preserve">, but different tables.</a:t>
             </a:r>
             <a:endParaRPr lang="en-US" sz="1575" dirty="0"/>
+          </a:p>
+        </p:txBody>
+      </p:sp>
+      <p:sp>
+        <p:nvSpPr>
+          <p:cNvPr id="100" name="Slide Number 100"/>
+          <p:cNvSpPr txBox="1"/>
+          <p:nvPr/>
+        </p:nvSpPr>
+        <p:spPr>
+          <a:xfrm>
+            <a:off x="11277295" y="6611112"/>
+            <a:ext cx="685800" cy="201168"/>
+          </a:xfrm>
+          <a:prstGeom prst="rect">
+            <a:avLst/>
+          </a:prstGeom>
+          <a:noFill/>
+        </p:spPr>
+        <p:txBody>
+          <a:bodyPr wrap="none" lIns="0" tIns="0" rIns="0" bIns="0" anchor="b">
+            <a:noAutofit/>
+          </a:bodyPr>
+          <a:lstStyle/>
+          <a:p>
+            <a:pPr algn="r"/>
+            <a:fld id="{5C1A6E0B-3B1F-4D5E-9C7A-2F4B8D6E1A90}" type="slidenum">
+              <a:rPr lang="en-US" sz="1200" dirty="0">
+                <a:solidFill>
+                  <a:srgbClr val="5F6272"/>
+                </a:solidFill>
+              </a:rPr>
+              <a:t>8</a:t>
+            </a:fld>
           </a:p>
         </p:txBody>
       </p:sp>
@@ -48514,6 +49330,40 @@
               <a:t xml:space="preserve"> linear function?</a:t>
             </a:r>
             <a:endParaRPr lang="en-US" sz="1650" dirty="0"/>
+          </a:p>
+        </p:txBody>
+      </p:sp>
+      <p:sp>
+        <p:nvSpPr>
+          <p:cNvPr id="12" name="Slide Number 12"/>
+          <p:cNvSpPr txBox="1"/>
+          <p:nvPr/>
+        </p:nvSpPr>
+        <p:spPr>
+          <a:xfrm>
+            <a:off x="11277295" y="6611112"/>
+            <a:ext cx="685800" cy="201168"/>
+          </a:xfrm>
+          <a:prstGeom prst="rect">
+            <a:avLst/>
+          </a:prstGeom>
+          <a:noFill/>
+        </p:spPr>
+        <p:txBody>
+          <a:bodyPr wrap="none" lIns="0" tIns="0" rIns="0" bIns="0" anchor="b">
+            <a:noAutofit/>
+          </a:bodyPr>
+          <a:lstStyle/>
+          <a:p>
+            <a:pPr algn="r"/>
+            <a:fld id="{5C1A6E0B-3B1F-4D5E-9C7A-2F4B8D6E1A90}" type="slidenum">
+              <a:rPr lang="en-US" sz="1200" dirty="0">
+                <a:solidFill>
+                  <a:srgbClr val="5F6272"/>
+                </a:solidFill>
+              </a:rPr>
+              <a:t>9</a:t>
+            </a:fld>
           </a:p>
         </p:txBody>
       </p:sp>

--- a/Section 504/t2-lesson2-vertical-horizontal-transformations-504.pptx
+++ b/Section 504/t2-lesson2-vertical-horizontal-transformations-504.pptx
@@ -477,7 +477,7 @@
           <a:p>
             <a:r>
               <a:rPr lang="en-US" dirty="0"/>
-              <a:t>Added for this deck; not from the textbook. Have this up as students walk in; they work silently while you take attendance (about 5 minutes). The same 4 questions are on the online Day 2 bell work. Reveal the answers one at a time. Answer key: 1. A horizontal translation right 5 subtracts 5 from the input: f(x − 5). 2. f(x − 5) = x − 5 = f(x) − 5, a vertical translation down 5. 3. 2(x + 4) − 1 = 2x + 8 − 1 = 2x + 7. 4. f(2x) = 2x and 2f(x) = 2x. For the parent function they match.</a:t>
+              <a:t>Added for this deck; not from the textbook. Have this up as students walk in; they work silently while you take attendance (about 5 minutes). The same 4 questions are on the online Day 2 bell work. Reveal the answers one at a time. Answer key: 1. A horizontal translation right 5 subtracts 5 from the input: f(x − 5). 2. f(x − 5) = x − 5 = f(x) − 5, a vertical translation down 5. 3. 2(x + 4) − 1 = 2x + 8 − 1 = 2x + 7. 4. Right 2 means f(x − 2) = 3(x − 2). Distribute: 3x − 6.</a:t>
             </a:r>
           </a:p>
         </p:txBody>
@@ -831,7 +831,7 @@
           <a:p>
             <a:r>
               <a:rPr lang="en-US" dirty="0"/>
-              <a:t>Added for this deck; not from the textbook. Have this up as students walk in; they work silently while you take attendance (about 5 minutes). The same 4 questions are on the online Day 1 bell work. Reveal the answers one at a time. Answer key: 1. Subtracting from the output is a vertical translation down 3. 2. In y = mx + b, m is the slope. 3. Set g(x) = 0: 3x − 8 = 0, so x = 8/3. 4. The slope −⅔ is negative, so the line falls from left to right.</a:t>
+              <a:t>Added for this deck; not from the textbook. Have this up as students walk in; they work silently while you take attendance (about 5 minutes). The same 4 questions are on the online Day 1 bell work. Reveal the answers one at a time. Answer key: 1. Subtracting from the output is a vertical translation down 3. 2. In y = mx + b, m is the slope. 3. Set g(x) = 0: 3x − 8 = 0, so x = 8/3. 4. Replace f(x) with x: g(x) = 2x − 3, a vertical dilation by 2 and a translation down 3.</a:t>
             </a:r>
           </a:p>
         </p:txBody>
@@ -8882,7 +8882,7 @@
         <p:spPr>
           <a:xfrm>
             <a:off x="6362548" y="3243834"/>
-            <a:ext cx="5143348" cy="649224"/>
+            <a:ext cx="5143348" cy="946404"/>
           </a:xfrm>
           <a:prstGeom prst="rect">
             <a:avLst/>
@@ -8911,7 +8911,7 @@
                 <a:latin typeface="Segoe UI"/>
                 <a:cs typeface="Segoe UI"/>
               </a:rPr>
-              <a:t xml:space="preserve">4. For </a:t>
+              <a:t xml:space="preserve">4. The graph of </a:t>
             </a:r>
             <a:r>
               <a:rPr lang="en-US" sz="1950" dirty="0" i="1">
@@ -8951,7 +8951,7 @@
                 <a:latin typeface="Cambria"/>
                 <a:cs typeface="Cambria"/>
               </a:rPr>
-              <a:t xml:space="preserve">) = </a:t>
+              <a:t xml:space="preserve">) = 3</a:t>
             </a:r>
             <a:r>
               <a:rPr lang="en-US" sz="1950" dirty="0" i="1">
@@ -8971,127 +8971,17 @@
                 <a:latin typeface="Segoe UI"/>
                 <a:cs typeface="Segoe UI"/>
               </a:rPr>
-              <a:t xml:space="preserve">, is the graph of </a:t>
-            </a:r>
-            <a:r>
-              <a:rPr lang="en-US" sz="1950" dirty="0" i="1">
-                <a:solidFill>
-                  <a:srgbClr val="16171D"/>
-                </a:solidFill>
-                <a:latin typeface="Cambria"/>
-                <a:cs typeface="Cambria"/>
-              </a:rPr>
-              <a:t xml:space="preserve">f</a:t>
-            </a:r>
-            <a:r>
-              <a:rPr lang="en-US" sz="1950" dirty="0">
-                <a:solidFill>
-                  <a:srgbClr val="16171D"/>
-                </a:solidFill>
-                <a:latin typeface="Cambria"/>
-                <a:cs typeface="Cambria"/>
-              </a:rPr>
-              <a:t xml:space="preserve">(2</a:t>
-            </a:r>
-            <a:r>
-              <a:rPr lang="en-US" sz="1950" dirty="0" i="1">
-                <a:solidFill>
-                  <a:srgbClr val="16171D"/>
-                </a:solidFill>
-                <a:latin typeface="Cambria"/>
-                <a:cs typeface="Cambria"/>
-              </a:rPr>
-              <a:t xml:space="preserve">x</a:t>
-            </a:r>
-            <a:r>
-              <a:rPr lang="en-US" sz="1950" dirty="0">
-                <a:solidFill>
-                  <a:srgbClr val="16171D"/>
-                </a:solidFill>
-                <a:latin typeface="Cambria"/>
-                <a:cs typeface="Cambria"/>
-              </a:rPr>
-              <a:t xml:space="preserve">)</a:t>
-            </a:r>
-            <a:r>
-              <a:rPr lang="en-US" sz="1950" dirty="0">
-                <a:solidFill>
-                  <a:srgbClr val="16171D"/>
+              <a:t xml:space="preserve"> is translated right 2 units. Which function represents the new graph? </a:t>
+            </a:r>
+            <a:r>
+              <a:rPr lang="en-US" sz="1575" dirty="0">
+                <a:solidFill>
+                  <a:srgbClr val="5F6272"/>
                 </a:solidFill>
                 <a:latin typeface="Segoe UI"/>
                 <a:cs typeface="Segoe UI"/>
               </a:rPr>
-              <a:t xml:space="preserve"> the same as the graph of </a:t>
-            </a:r>
-            <a:r>
-              <a:rPr lang="en-US" sz="1950" dirty="0">
-                <a:solidFill>
-                  <a:srgbClr val="16171D"/>
-                </a:solidFill>
-                <a:latin typeface="Cambria"/>
-                <a:cs typeface="Cambria"/>
-              </a:rPr>
-              <a:t xml:space="preserve">2</a:t>
-            </a:r>
-            <a:r>
-              <a:rPr lang="en-US" sz="1950" dirty="0" i="1">
-                <a:solidFill>
-                  <a:srgbClr val="16171D"/>
-                </a:solidFill>
-                <a:latin typeface="Cambria"/>
-                <a:cs typeface="Cambria"/>
-              </a:rPr>
-              <a:t xml:space="preserve">f</a:t>
-            </a:r>
-            <a:r>
-              <a:rPr lang="en-US" sz="1950" dirty="0">
-                <a:solidFill>
-                  <a:srgbClr val="16171D"/>
-                </a:solidFill>
-                <a:latin typeface="Cambria"/>
-                <a:cs typeface="Cambria"/>
-              </a:rPr>
-              <a:t xml:space="preserve">(</a:t>
-            </a:r>
-            <a:r>
-              <a:rPr lang="en-US" sz="1950" dirty="0" i="1">
-                <a:solidFill>
-                  <a:srgbClr val="16171D"/>
-                </a:solidFill>
-                <a:latin typeface="Cambria"/>
-                <a:cs typeface="Cambria"/>
-              </a:rPr>
-              <a:t xml:space="preserve">x</a:t>
-            </a:r>
-            <a:r>
-              <a:rPr lang="en-US" sz="1950" dirty="0">
-                <a:solidFill>
-                  <a:srgbClr val="16171D"/>
-                </a:solidFill>
-                <a:latin typeface="Cambria"/>
-                <a:cs typeface="Cambria"/>
-              </a:rPr>
-              <a:t xml:space="preserve">)</a:t>
-            </a:r>
-            <a:r>
-              <a:rPr lang="en-US" sz="1950" dirty="0">
-                <a:solidFill>
-                  <a:srgbClr val="16171D"/>
-                </a:solidFill>
-                <a:latin typeface="Segoe UI"/>
-                <a:cs typeface="Segoe UI"/>
-              </a:rPr>
-              <a:t xml:space="preserve">? </a:t>
-            </a:r>
-            <a:r>
-              <a:rPr lang="en-US" sz="1575" dirty="0">
-                <a:solidFill>
-                  <a:srgbClr val="5F6272"/>
-                </a:solidFill>
-                <a:latin typeface="Segoe UI"/>
-                <a:cs typeface="Segoe UI"/>
-              </a:rPr>
-              <a:t xml:space="preserve">(SE p. 295)</a:t>
+              <a:t xml:space="preserve">(SE p. 293)</a:t>
             </a:r>
             <a:endParaRPr lang="en-US" sz="1950" dirty="0"/>
           </a:p>
@@ -9105,8 +8995,8 @@
         </p:nvSpPr>
         <p:spPr>
           <a:xfrm>
-            <a:off x="6362548" y="4026408"/>
-            <a:ext cx="5143348" cy="518922"/>
+            <a:off x="6362548" y="4323588"/>
+            <a:ext cx="4068806" cy="518922"/>
           </a:xfrm>
           <a:prstGeom prst="roundRect">
             <a:avLst>
@@ -9142,6 +9032,16 @@
               <a:t xml:space="preserve">ANSWER   </a:t>
             </a:r>
             <a:r>
+              <a:rPr lang="en-US" sz="2325" dirty="0" i="1">
+                <a:solidFill>
+                  <a:srgbClr val="16171D"/>
+                </a:solidFill>
+                <a:latin typeface="Cambria"/>
+                <a:cs typeface="Cambria"/>
+              </a:rPr>
+              <a:t xml:space="preserve">g</a:t>
+            </a:r>
+            <a:r>
               <a:rPr lang="en-US" sz="2325" dirty="0">
                 <a:solidFill>
                   <a:srgbClr val="16171D"/>
@@ -9149,7 +9049,7 @@
                 <a:latin typeface="Cambria"/>
                 <a:cs typeface="Cambria"/>
               </a:rPr>
-              <a:t xml:space="preserve">Yes, both are </a:t>
+              <a:t xml:space="preserve">(</a:t>
             </a:r>
             <a:r>
               <a:rPr lang="en-US" sz="2325" dirty="0" i="1">
@@ -9159,7 +9059,7 @@
                 <a:latin typeface="Cambria"/>
                 <a:cs typeface="Cambria"/>
               </a:rPr>
-              <a:t xml:space="preserve">y</a:t>
+              <a:t xml:space="preserve">x</a:t>
             </a:r>
             <a:r>
               <a:rPr lang="en-US" sz="2325" dirty="0">
@@ -9169,7 +9069,7 @@
                 <a:latin typeface="Cambria"/>
                 <a:cs typeface="Cambria"/>
               </a:rPr>
-              <a:t xml:space="preserve"> = 2</a:t>
+              <a:t xml:space="preserve">) = 3</a:t>
             </a:r>
             <a:r>
               <a:rPr lang="en-US" sz="2325" dirty="0" i="1">
@@ -9180,6 +9080,16 @@
                 <a:cs typeface="Cambria"/>
               </a:rPr>
               <a:t xml:space="preserve">x</a:t>
+            </a:r>
+            <a:r>
+              <a:rPr lang="en-US" sz="2325" dirty="0">
+                <a:solidFill>
+                  <a:srgbClr val="16171D"/>
+                </a:solidFill>
+                <a:latin typeface="Cambria"/>
+                <a:cs typeface="Cambria"/>
+              </a:rPr>
+              <a:t xml:space="preserve"> − 6</a:t>
             </a:r>
             <a:endParaRPr lang="en-US" sz="2325" dirty="0"/>
           </a:p>
@@ -27676,7 +27586,7 @@
         <p:spPr>
           <a:xfrm>
             <a:off x="6362548" y="3243834"/>
-            <a:ext cx="5143348" cy="649224"/>
+            <a:ext cx="5143348" cy="946404"/>
           </a:xfrm>
           <a:prstGeom prst="rect">
             <a:avLst/>
@@ -27705,7 +27615,7 @@
                 <a:latin typeface="Segoe UI"/>
                 <a:cs typeface="Segoe UI"/>
               </a:rPr>
-              <a:t xml:space="preserve">4. Is </a:t>
+              <a:t xml:space="preserve">4. Let </a:t>
             </a:r>
             <a:r>
               <a:rPr lang="en-US" sz="1950" dirty="0" i="1">
@@ -27715,7 +27625,7 @@
                 <a:latin typeface="Cambria"/>
                 <a:cs typeface="Cambria"/>
               </a:rPr>
-              <a:t xml:space="preserve">h</a:t>
+              <a:t xml:space="preserve">f</a:t>
             </a:r>
             <a:r>
               <a:rPr lang="en-US" sz="1950" dirty="0">
@@ -27745,7 +27655,7 @@
                 <a:latin typeface="Cambria"/>
                 <a:cs typeface="Cambria"/>
               </a:rPr>
-              <a:t xml:space="preserve">) = −⅔</a:t>
+              <a:t xml:space="preserve">) = </a:t>
             </a:r>
             <a:r>
               <a:rPr lang="en-US" sz="1950" dirty="0" i="1">
@@ -27756,16 +27666,6 @@
                 <a:cs typeface="Cambria"/>
               </a:rPr>
               <a:t xml:space="preserve">x</a:t>
-            </a:r>
-            <a:r>
-              <a:rPr lang="en-US" sz="1950" dirty="0">
-                <a:solidFill>
-                  <a:srgbClr val="16171D"/>
-                </a:solidFill>
-                <a:latin typeface="Cambria"/>
-                <a:cs typeface="Cambria"/>
-              </a:rPr>
-              <a:t xml:space="preserve"> + 5</a:t>
             </a:r>
             <a:r>
               <a:rPr lang="en-US" sz="1950" dirty="0">
@@ -27775,17 +27675,157 @@
                 <a:latin typeface="Segoe UI"/>
                 <a:cs typeface="Segoe UI"/>
               </a:rPr>
-              <a:t xml:space="preserve"> increasing or decreasing? </a:t>
-            </a:r>
-            <a:r>
-              <a:rPr lang="en-US" sz="1575" dirty="0">
-                <a:solidFill>
-                  <a:srgbClr val="5F6272"/>
+              <a:t xml:space="preserve"> and </a:t>
+            </a:r>
+            <a:r>
+              <a:rPr lang="en-US" sz="1950" dirty="0" i="1">
+                <a:solidFill>
+                  <a:srgbClr val="16171D"/>
+                </a:solidFill>
+                <a:latin typeface="Cambria"/>
+                <a:cs typeface="Cambria"/>
+              </a:rPr>
+              <a:t xml:space="preserve">g</a:t>
+            </a:r>
+            <a:r>
+              <a:rPr lang="en-US" sz="1950" dirty="0">
+                <a:solidFill>
+                  <a:srgbClr val="16171D"/>
+                </a:solidFill>
+                <a:latin typeface="Cambria"/>
+                <a:cs typeface="Cambria"/>
+              </a:rPr>
+              <a:t xml:space="preserve">(</a:t>
+            </a:r>
+            <a:r>
+              <a:rPr lang="en-US" sz="1950" dirty="0" i="1">
+                <a:solidFill>
+                  <a:srgbClr val="16171D"/>
+                </a:solidFill>
+                <a:latin typeface="Cambria"/>
+                <a:cs typeface="Cambria"/>
+              </a:rPr>
+              <a:t xml:space="preserve">x</a:t>
+            </a:r>
+            <a:r>
+              <a:rPr lang="en-US" sz="1950" dirty="0">
+                <a:solidFill>
+                  <a:srgbClr val="16171D"/>
+                </a:solidFill>
+                <a:latin typeface="Cambria"/>
+                <a:cs typeface="Cambria"/>
+              </a:rPr>
+              <a:t xml:space="preserve">) = 2</a:t>
+            </a:r>
+            <a:r>
+              <a:rPr lang="en-US" sz="1950" dirty="0" i="1">
+                <a:solidFill>
+                  <a:srgbClr val="16171D"/>
+                </a:solidFill>
+                <a:latin typeface="Cambria"/>
+                <a:cs typeface="Cambria"/>
+              </a:rPr>
+              <a:t xml:space="preserve">f</a:t>
+            </a:r>
+            <a:r>
+              <a:rPr lang="en-US" sz="1950" dirty="0">
+                <a:solidFill>
+                  <a:srgbClr val="16171D"/>
+                </a:solidFill>
+                <a:latin typeface="Cambria"/>
+                <a:cs typeface="Cambria"/>
+              </a:rPr>
+              <a:t xml:space="preserve">(</a:t>
+            </a:r>
+            <a:r>
+              <a:rPr lang="en-US" sz="1950" dirty="0" i="1">
+                <a:solidFill>
+                  <a:srgbClr val="16171D"/>
+                </a:solidFill>
+                <a:latin typeface="Cambria"/>
+                <a:cs typeface="Cambria"/>
+              </a:rPr>
+              <a:t xml:space="preserve">x</a:t>
+            </a:r>
+            <a:r>
+              <a:rPr lang="en-US" sz="1950" dirty="0">
+                <a:solidFill>
+                  <a:srgbClr val="16171D"/>
+                </a:solidFill>
+                <a:latin typeface="Cambria"/>
+                <a:cs typeface="Cambria"/>
+              </a:rPr>
+              <a:t xml:space="preserve">) − 3</a:t>
+            </a:r>
+            <a:r>
+              <a:rPr lang="en-US" sz="1950" dirty="0">
+                <a:solidFill>
+                  <a:srgbClr val="16171D"/>
                 </a:solidFill>
                 <a:latin typeface="Segoe UI"/>
                 <a:cs typeface="Segoe UI"/>
               </a:rPr>
-              <a:t xml:space="preserve">(SE p. 288)</a:t>
+              <a:t xml:space="preserve">. Which is </a:t>
+            </a:r>
+            <a:r>
+              <a:rPr lang="en-US" sz="1950" dirty="0" i="1">
+                <a:solidFill>
+                  <a:srgbClr val="16171D"/>
+                </a:solidFill>
+                <a:latin typeface="Cambria"/>
+                <a:cs typeface="Cambria"/>
+              </a:rPr>
+              <a:t xml:space="preserve">g</a:t>
+            </a:r>
+            <a:r>
+              <a:rPr lang="en-US" sz="1950" dirty="0">
+                <a:solidFill>
+                  <a:srgbClr val="16171D"/>
+                </a:solidFill>
+                <a:latin typeface="Cambria"/>
+                <a:cs typeface="Cambria"/>
+              </a:rPr>
+              <a:t xml:space="preserve">(</a:t>
+            </a:r>
+            <a:r>
+              <a:rPr lang="en-US" sz="1950" dirty="0" i="1">
+                <a:solidFill>
+                  <a:srgbClr val="16171D"/>
+                </a:solidFill>
+                <a:latin typeface="Cambria"/>
+                <a:cs typeface="Cambria"/>
+              </a:rPr>
+              <a:t xml:space="preserve">x</a:t>
+            </a:r>
+            <a:r>
+              <a:rPr lang="en-US" sz="1950" dirty="0">
+                <a:solidFill>
+                  <a:srgbClr val="16171D"/>
+                </a:solidFill>
+                <a:latin typeface="Cambria"/>
+                <a:cs typeface="Cambria"/>
+              </a:rPr>
+              <a:t xml:space="preserve">)</a:t>
+            </a:r>
+            <a:r>
+              <a:rPr lang="en-US" sz="1950" dirty="0">
+                <a:solidFill>
+                  <a:srgbClr val="16171D"/>
+                </a:solidFill>
+                <a:latin typeface="Segoe UI"/>
+                <a:cs typeface="Segoe UI"/>
+              </a:rPr>
+              <a:t xml:space="preserve"> in slope-intercept form? </a:t>
+            </a:r>
+            <a:r>
+              <a:rPr lang="en-US" sz="1575" dirty="0">
+                <a:solidFill>
+                  <a:srgbClr val="5F6272"/>
+                </a:solidFill>
+                <a:latin typeface="Segoe UI"/>
+                <a:cs typeface="Segoe UI"/>
+              </a:rPr>
+              <a:t xml:space="preserve">(SE p. 280)</a:t>
             </a:r>
             <a:endParaRPr lang="en-US" sz="1950" dirty="0"/>
           </a:p>
@@ -27799,8 +27839,8 @@
         </p:nvSpPr>
         <p:spPr>
           <a:xfrm>
-            <a:off x="6362548" y="4026408"/>
-            <a:ext cx="3571326" cy="518922"/>
+            <a:off x="6362548" y="4323588"/>
+            <a:ext cx="4068806" cy="518922"/>
           </a:xfrm>
           <a:prstGeom prst="roundRect">
             <a:avLst>
@@ -27836,6 +27876,16 @@
               <a:t xml:space="preserve">ANSWER   </a:t>
             </a:r>
             <a:r>
+              <a:rPr lang="en-US" sz="2325" dirty="0" i="1">
+                <a:solidFill>
+                  <a:srgbClr val="16171D"/>
+                </a:solidFill>
+                <a:latin typeface="Cambria"/>
+                <a:cs typeface="Cambria"/>
+              </a:rPr>
+              <a:t xml:space="preserve">g</a:t>
+            </a:r>
+            <a:r>
               <a:rPr lang="en-US" sz="2325" dirty="0">
                 <a:solidFill>
                   <a:srgbClr val="16171D"/>
@@ -27843,7 +27893,47 @@
                 <a:latin typeface="Cambria"/>
                 <a:cs typeface="Cambria"/>
               </a:rPr>
-              <a:t xml:space="preserve">Decreasing</a:t>
+              <a:t xml:space="preserve">(</a:t>
+            </a:r>
+            <a:r>
+              <a:rPr lang="en-US" sz="2325" dirty="0" i="1">
+                <a:solidFill>
+                  <a:srgbClr val="16171D"/>
+                </a:solidFill>
+                <a:latin typeface="Cambria"/>
+                <a:cs typeface="Cambria"/>
+              </a:rPr>
+              <a:t xml:space="preserve">x</a:t>
+            </a:r>
+            <a:r>
+              <a:rPr lang="en-US" sz="2325" dirty="0">
+                <a:solidFill>
+                  <a:srgbClr val="16171D"/>
+                </a:solidFill>
+                <a:latin typeface="Cambria"/>
+                <a:cs typeface="Cambria"/>
+              </a:rPr>
+              <a:t xml:space="preserve">) = 2</a:t>
+            </a:r>
+            <a:r>
+              <a:rPr lang="en-US" sz="2325" dirty="0" i="1">
+                <a:solidFill>
+                  <a:srgbClr val="16171D"/>
+                </a:solidFill>
+                <a:latin typeface="Cambria"/>
+                <a:cs typeface="Cambria"/>
+              </a:rPr>
+              <a:t xml:space="preserve">x</a:t>
+            </a:r>
+            <a:r>
+              <a:rPr lang="en-US" sz="2325" dirty="0">
+                <a:solidFill>
+                  <a:srgbClr val="16171D"/>
+                </a:solidFill>
+                <a:latin typeface="Cambria"/>
+                <a:cs typeface="Cambria"/>
+              </a:rPr>
+              <a:t xml:space="preserve"> − 3</a:t>
             </a:r>
             <a:endParaRPr lang="en-US" sz="2325" dirty="0"/>
           </a:p>

--- a/Section 504/t2-lesson2-vertical-horizontal-transformations-504.pptx
+++ b/Section 504/t2-lesson2-vertical-horizontal-transformations-504.pptx
@@ -2643,7 +2643,7 @@
                 <a:latin typeface="Segoe UI"/>
                 <a:cs typeface="Segoe UI"/>
               </a:rPr>
-              <a:t xml:space="preserve">Day 1 · Activity 2.1 · Questions 6–9 · SE pp. 292–294</a:t>
+              <a:t xml:space="preserve">Day 1 · Activity 2.1 · Questions 6–9 · SE pp. 292–294 · ★ Essential</a:t>
             </a:r>
             <a:endParaRPr lang="en-US" sz="1200" dirty="0"/>
           </a:p>
@@ -5939,7 +5939,7 @@
                 <a:latin typeface="Segoe UI"/>
                 <a:cs typeface="Segoe UI"/>
               </a:rPr>
-              <a:t xml:space="preserve">Day 1 · Activity 2.1 · Summary</a:t>
+              <a:t xml:space="preserve">Day 1 · Activity 2.1 · Summary · ★ Essential</a:t>
             </a:r>
             <a:endParaRPr lang="en-US" sz="1200" dirty="0"/>
           </a:p>
@@ -9753,7 +9753,7 @@
                 <a:latin typeface="Segoe UI"/>
                 <a:cs typeface="Segoe UI"/>
               </a:rPr>
-              <a:t xml:space="preserve">☐ Activity 2.2: horizontal vs. vertical dilations</a:t>
+              <a:t xml:space="preserve">☐ Activity 2.2: horizontal vs. vertical dilations ★ Essential</a:t>
             </a:r>
             <a:endParaRPr lang="en-US" sz="1950" dirty="0"/>
           </a:p>
@@ -9797,7 +9797,7 @@
                 <a:latin typeface="Segoe UI"/>
                 <a:cs typeface="Segoe UI"/>
               </a:rPr>
-              <a:t xml:space="preserve">☐ Activity 2.3: describe and graph</a:t>
+              <a:t xml:space="preserve">☐ Activity 2.3: describe and graph ★ Essential</a:t>
             </a:r>
             <a:endParaRPr lang="en-US" sz="1950" dirty="0"/>
           </a:p>
@@ -10039,7 +10039,7 @@
                 <a:latin typeface="Segoe UI"/>
                 <a:cs typeface="Segoe UI"/>
               </a:rPr>
-              <a:t xml:space="preserve">Day 2 · Activity 2.2 · Comparing Vertical and Horizontal Dilations · SE pp. 295–296</a:t>
+              <a:t xml:space="preserve">Day 2 · Activity 2.2 · Comparing Vertical and Horizontal Dilations · SE pp. 295–296 · ★ Essential</a:t>
             </a:r>
             <a:endParaRPr lang="en-US" sz="1200" dirty="0"/>
           </a:p>
@@ -16112,7 +16112,7 @@
                 <a:latin typeface="Segoe UI"/>
                 <a:cs typeface="Segoe UI"/>
               </a:rPr>
-              <a:t xml:space="preserve">Day 2 · Activity 2.2 · Questions 2–3 · SE p. 296</a:t>
+              <a:t xml:space="preserve">Day 2 · Activity 2.2 · Questions 2–3 · SE p. 296 · ★ Essential</a:t>
             </a:r>
             <a:endParaRPr lang="en-US" sz="1200" dirty="0"/>
           </a:p>
@@ -21275,7 +21275,7 @@
                 <a:latin typeface="Segoe UI"/>
                 <a:cs typeface="Segoe UI"/>
               </a:rPr>
-              <a:t xml:space="preserve">Day 2 · Activity 2.2 · Question 4 · SE p. 297</a:t>
+              <a:t xml:space="preserve">Day 2 · Activity 2.2 · Question 4 · SE p. 297 · ★ Essential</a:t>
             </a:r>
             <a:endParaRPr lang="en-US" sz="1200" dirty="0"/>
           </a:p>
@@ -23597,7 +23597,7 @@
                 <a:latin typeface="Segoe UI"/>
                 <a:cs typeface="Segoe UI"/>
               </a:rPr>
-              <a:t xml:space="preserve">Day 2 · Activity 2.3 · Graphing Linear Transformations · SE pp. 298–300</a:t>
+              <a:t xml:space="preserve">Day 2 · Activity 2.3 · Graphing Linear Transformations · SE pp. 298–300 · ★ Essential</a:t>
             </a:r>
             <a:endParaRPr lang="en-US" sz="1200" dirty="0"/>
           </a:p>
@@ -35271,7 +35271,7 @@
                 <a:latin typeface="Segoe UI"/>
                 <a:cs typeface="Segoe UI"/>
               </a:rPr>
-              <a:t xml:space="preserve">☐ Getting Started: key characteristics</a:t>
+              <a:t xml:space="preserve">☐ Getting Started: key characteristics ★ Essential</a:t>
             </a:r>
             <a:endParaRPr lang="en-US" sz="1950" dirty="0"/>
           </a:p>
@@ -35315,7 +35315,7 @@
                 <a:latin typeface="Segoe UI"/>
                 <a:cs typeface="Segoe UI"/>
               </a:rPr>
-              <a:t xml:space="preserve">☐ Activity 2.1: horizontal vs. vertical translations</a:t>
+              <a:t xml:space="preserve">☐ Activity 2.1: horizontal vs. vertical translations ★ Essential</a:t>
             </a:r>
             <a:endParaRPr lang="en-US" sz="1950" dirty="0"/>
           </a:p>
@@ -37724,7 +37724,7 @@
                 <a:latin typeface="Segoe UI"/>
                 <a:cs typeface="Segoe UI"/>
               </a:rPr>
-              <a:t xml:space="preserve">Day 1 · Getting Started · Hey, I Remember This! · SE p. 288</a:t>
+              <a:t xml:space="preserve">Day 1 · Getting Started · Hey, I Remember This! · SE p. 288 · ★ Essential</a:t>
             </a:r>
             <a:endParaRPr lang="en-US" sz="1200" dirty="0"/>
           </a:p>
@@ -42134,7 +42134,7 @@
                 <a:latin typeface="Segoe UI"/>
                 <a:cs typeface="Segoe UI"/>
               </a:rPr>
-              <a:t xml:space="preserve">Day 1 · Activity 2.1 · Comparing Vertical and Horizontal Translations · SE pp. 289–290</a:t>
+              <a:t xml:space="preserve">Day 1 · Activity 2.1 · Comparing Vertical and Horizontal Translations · SE pp. 289–290 · ★ Essential</a:t>
             </a:r>
             <a:endParaRPr lang="en-US" sz="1200" dirty="0"/>
           </a:p>
@@ -48415,7 +48415,7 @@
                 <a:latin typeface="Segoe UI"/>
                 <a:cs typeface="Segoe UI"/>
               </a:rPr>
-              <a:t xml:space="preserve">Day 1 · Activity 2.1 · Definitions · SE p. 291</a:t>
+              <a:t xml:space="preserve">Day 1 · Activity 2.1 · Definitions · SE p. 291 · ★ Essential</a:t>
             </a:r>
             <a:endParaRPr lang="en-US" sz="1200" dirty="0"/>
           </a:p>
